--- a/docs/patent-committee/특허심의위원회_설치운영안_보고.pptx
+++ b/docs/patent-committee/특허심의위원회_설치운영안_보고.pptx
@@ -9563,7 +9563,7 @@
                 <a:gridCol w="5193792"/>
                 <a:gridCol w="3017520"/>
               </a:tblGrid>
-              <a:tr h="512064">
+              <a:tr h="603504">
                 <a:tc>
                   <a:txBody>
                     <a:bodyPr/>
@@ -9769,7 +9769,7 @@
                   </a:tcPr>
                 </a:tc>
               </a:tr>
-              <a:tr h="512064">
+              <a:tr h="603504">
                 <a:tc>
                   <a:txBody>
                     <a:bodyPr/>
@@ -9996,7 +9996,7 @@
                   </a:tcPr>
                 </a:tc>
               </a:tr>
-              <a:tr h="512064">
+              <a:tr h="603504">
                 <a:tc>
                   <a:txBody>
                     <a:bodyPr/>
@@ -10223,7 +10223,7 @@
                   </a:tcPr>
                 </a:tc>
               </a:tr>
-              <a:tr h="512064">
+              <a:tr h="603504">
                 <a:tc>
                   <a:txBody>
                     <a:bodyPr/>
@@ -10450,234 +10450,7 @@
                   </a:tcPr>
                 </a:tc>
               </a:tr>
-              <a:tr h="512064">
-                <a:tc>
-                  <a:txBody>
-                    <a:bodyPr/>
-                    <a:lstStyle/>
-                    <a:p>
-                      <a:pPr algn="ctr" indent="0" marL="0">
-                        <a:buNone/>
-                      </a:pPr>
-                      <a:r>
-                        <a:rPr lang="en-US" sz="1050" b="1" dirty="0">
-                          <a:solidFill>
-                            <a:srgbClr val="10173A"/>
-                          </a:solidFill>
-                          <a:latin typeface="맑은 고딕" pitchFamily="34" charset="0"/>
-                          <a:ea typeface="맑은 고딕" pitchFamily="34" charset="-122"/>
-                          <a:cs typeface="맑은 고딕" pitchFamily="34" charset="-120"/>
-                        </a:rPr>
-                        <a:t>제16조</a:t>
-                      </a:r>
-                      <a:endParaRPr lang="en-US" sz="1050" dirty="0">
-                        <a:latin typeface="맑은 고딕" charset="0"/>
-                        <a:ea typeface="맑은 고딕" charset="0"/>
-                        <a:cs typeface="맑은 고딕" charset="0"/>
-                      </a:endParaRPr>
-                    </a:p>
-                    <a:p>
-                      <a:pPr algn="ctr" indent="0" marL="0">
-                        <a:buNone/>
-                      </a:pPr>
-                      <a:r>
-                        <a:rPr lang="en-US" sz="1050" b="1" dirty="0">
-                          <a:solidFill>
-                            <a:srgbClr val="10173A"/>
-                          </a:solidFill>
-                          <a:latin typeface="맑은 고딕" pitchFamily="34" charset="0"/>
-                          <a:ea typeface="맑은 고딕" pitchFamily="34" charset="-122"/>
-                          <a:cs typeface="맑은 고딕" pitchFamily="34" charset="-120"/>
-                        </a:rPr>
-                        <a:t>출원 유보 시의 보상</a:t>
-                      </a:r>
-                      <a:endParaRPr lang="en-US" sz="1050" dirty="0">
-                        <a:latin typeface="맑은 고딕" charset="0"/>
-                        <a:ea typeface="맑은 고딕" charset="0"/>
-                        <a:cs typeface="맑은 고딕" charset="0"/>
-                      </a:endParaRPr>
-                    </a:p>
-                  </a:txBody>
-                  <a:tcPr marL="91440" marR="91440" marT="45720" marB="45720" anchor="ctr">
-                    <a:lnL w="12700" cap="flat" cmpd="sng" algn="ctr">
-                      <a:solidFill>
-                        <a:srgbClr val="C9D8EC"/>
-                      </a:solidFill>
-                      <a:prstDash val="solid"/>
-                      <a:round/>
-                      <a:headEnd type="none" w="med" len="med"/>
-                      <a:tailEnd type="none" w="med" len="med"/>
-                    </a:lnL>
-                    <a:lnR w="12700" cap="flat" cmpd="sng" algn="ctr">
-                      <a:solidFill>
-                        <a:srgbClr val="C9D8EC"/>
-                      </a:solidFill>
-                      <a:prstDash val="solid"/>
-                      <a:round/>
-                      <a:headEnd type="none" w="med" len="med"/>
-                      <a:tailEnd type="none" w="med" len="med"/>
-                    </a:lnR>
-                    <a:lnT w="12700" cap="flat" cmpd="sng" algn="ctr">
-                      <a:solidFill>
-                        <a:srgbClr val="C9D8EC"/>
-                      </a:solidFill>
-                      <a:prstDash val="solid"/>
-                      <a:round/>
-                      <a:headEnd type="none" w="med" len="med"/>
-                      <a:tailEnd type="none" w="med" len="med"/>
-                    </a:lnT>
-                    <a:lnB w="12700" cap="flat" cmpd="sng" algn="ctr">
-                      <a:solidFill>
-                        <a:srgbClr val="C9D8EC"/>
-                      </a:solidFill>
-                      <a:prstDash val="solid"/>
-                      <a:round/>
-                      <a:headEnd type="none" w="med" len="med"/>
-                      <a:tailEnd type="none" w="med" len="med"/>
-                    </a:lnB>
-                    <a:solidFill>
-                      <a:srgbClr val="FFFFFF"/>
-                    </a:solidFill>
-                  </a:tcPr>
-                </a:tc>
-                <a:tc>
-                  <a:txBody>
-                    <a:bodyPr/>
-                    <a:lstStyle/>
-                    <a:p>
-                      <a:pPr algn="l" indent="0" marL="0">
-                        <a:buNone/>
-                      </a:pPr>
-                      <a:r>
-                        <a:rPr lang="en-US" sz="1100" dirty="0">
-                          <a:solidFill>
-                            <a:srgbClr val="333333"/>
-                          </a:solidFill>
-                          <a:latin typeface="맑은 고딕" pitchFamily="34" charset="0"/>
-                          <a:ea typeface="맑은 고딕" pitchFamily="34" charset="-122"/>
-                          <a:cs typeface="맑은 고딕" pitchFamily="34" charset="-120"/>
-                        </a:rPr>
-                        <a:t>승계 후 출원하지 않거나 출원을 포기·취하한 경우에도 정당한 보상</a:t>
-                      </a:r>
-                      <a:endParaRPr lang="en-US" sz="1100" dirty="0">
-                        <a:latin typeface="맑은 고딕" charset="0"/>
-                        <a:ea typeface="맑은 고딕" charset="0"/>
-                        <a:cs typeface="맑은 고딕" charset="0"/>
-                      </a:endParaRPr>
-                    </a:p>
-                  </a:txBody>
-                  <a:tcPr marL="91440" marR="91440" marT="45720" marB="45720" anchor="ctr">
-                    <a:lnL w="12700" cap="flat" cmpd="sng" algn="ctr">
-                      <a:solidFill>
-                        <a:srgbClr val="C9D8EC"/>
-                      </a:solidFill>
-                      <a:prstDash val="solid"/>
-                      <a:round/>
-                      <a:headEnd type="none" w="med" len="med"/>
-                      <a:tailEnd type="none" w="med" len="med"/>
-                    </a:lnL>
-                    <a:lnR w="12700" cap="flat" cmpd="sng" algn="ctr">
-                      <a:solidFill>
-                        <a:srgbClr val="C9D8EC"/>
-                      </a:solidFill>
-                      <a:prstDash val="solid"/>
-                      <a:round/>
-                      <a:headEnd type="none" w="med" len="med"/>
-                      <a:tailEnd type="none" w="med" len="med"/>
-                    </a:lnR>
-                    <a:lnT w="12700" cap="flat" cmpd="sng" algn="ctr">
-                      <a:solidFill>
-                        <a:srgbClr val="C9D8EC"/>
-                      </a:solidFill>
-                      <a:prstDash val="solid"/>
-                      <a:round/>
-                      <a:headEnd type="none" w="med" len="med"/>
-                      <a:tailEnd type="none" w="med" len="med"/>
-                    </a:lnT>
-                    <a:lnB w="12700" cap="flat" cmpd="sng" algn="ctr">
-                      <a:solidFill>
-                        <a:srgbClr val="C9D8EC"/>
-                      </a:solidFill>
-                      <a:prstDash val="solid"/>
-                      <a:round/>
-                      <a:headEnd type="none" w="med" len="med"/>
-                      <a:tailEnd type="none" w="med" len="med"/>
-                    </a:lnB>
-                    <a:solidFill>
-                      <a:srgbClr val="FFFFFF"/>
-                    </a:solidFill>
-                  </a:tcPr>
-                </a:tc>
-                <a:tc>
-                  <a:txBody>
-                    <a:bodyPr/>
-                    <a:lstStyle/>
-                    <a:p>
-                      <a:pPr algn="ctr" indent="0" marL="0">
-                        <a:buNone/>
-                      </a:pPr>
-                      <a:r>
-                        <a:rPr lang="en-US" sz="1100" b="1" dirty="0">
-                          <a:solidFill>
-                            <a:srgbClr val="1C67C7"/>
-                          </a:solidFill>
-                          <a:latin typeface="맑은 고딕" pitchFamily="34" charset="0"/>
-                          <a:ea typeface="맑은 고딕" pitchFamily="34" charset="-122"/>
-                          <a:cs typeface="맑은 고딕" pitchFamily="34" charset="-120"/>
-                        </a:rPr>
-                        <a:t>출원유보보상금 지급</a:t>
-                      </a:r>
-                      <a:endParaRPr lang="en-US" sz="1100" dirty="0">
-                        <a:latin typeface="맑은 고딕" charset="0"/>
-                        <a:ea typeface="맑은 고딕" charset="0"/>
-                        <a:cs typeface="맑은 고딕" charset="0"/>
-                      </a:endParaRPr>
-                    </a:p>
-                  </a:txBody>
-                  <a:tcPr marL="91440" marR="91440" marT="45720" marB="45720" anchor="ctr">
-                    <a:lnL w="12700" cap="flat" cmpd="sng" algn="ctr">
-                      <a:solidFill>
-                        <a:srgbClr val="C9D8EC"/>
-                      </a:solidFill>
-                      <a:prstDash val="solid"/>
-                      <a:round/>
-                      <a:headEnd type="none" w="med" len="med"/>
-                      <a:tailEnd type="none" w="med" len="med"/>
-                    </a:lnL>
-                    <a:lnR w="12700" cap="flat" cmpd="sng" algn="ctr">
-                      <a:solidFill>
-                        <a:srgbClr val="C9D8EC"/>
-                      </a:solidFill>
-                      <a:prstDash val="solid"/>
-                      <a:round/>
-                      <a:headEnd type="none" w="med" len="med"/>
-                      <a:tailEnd type="none" w="med" len="med"/>
-                    </a:lnR>
-                    <a:lnT w="12700" cap="flat" cmpd="sng" algn="ctr">
-                      <a:solidFill>
-                        <a:srgbClr val="C9D8EC"/>
-                      </a:solidFill>
-                      <a:prstDash val="solid"/>
-                      <a:round/>
-                      <a:headEnd type="none" w="med" len="med"/>
-                      <a:tailEnd type="none" w="med" len="med"/>
-                    </a:lnT>
-                    <a:lnB w="12700" cap="flat" cmpd="sng" algn="ctr">
-                      <a:solidFill>
-                        <a:srgbClr val="C9D8EC"/>
-                      </a:solidFill>
-                      <a:prstDash val="solid"/>
-                      <a:round/>
-                      <a:headEnd type="none" w="med" len="med"/>
-                      <a:tailEnd type="none" w="med" len="med"/>
-                    </a:lnB>
-                    <a:solidFill>
-                      <a:srgbClr val="FFFFFF"/>
-                    </a:solidFill>
-                  </a:tcPr>
-                </a:tc>
-              </a:tr>
-              <a:tr h="512064">
+              <a:tr h="603504">
                 <a:tc>
                   <a:txBody>
                     <a:bodyPr/>
@@ -10916,7 +10689,7 @@
         </p:nvSpPr>
         <p:spPr>
           <a:xfrm>
-            <a:off x="914400" y="5358384"/>
+            <a:off x="914400" y="5212080"/>
             <a:ext cx="10360152" cy="713232"/>
           </a:xfrm>
           <a:prstGeom prst="rect">
@@ -10941,7 +10714,7 @@
         </p:nvSpPr>
         <p:spPr>
           <a:xfrm>
-            <a:off x="1133856" y="5358384"/>
+            <a:off x="1133856" y="5212080"/>
             <a:ext cx="9921240" cy="713232"/>
           </a:xfrm>
           <a:prstGeom prst="rect">
@@ -14464,7 +14237,7 @@
                 <a:ea typeface="맑은 고딕" pitchFamily="34" charset="-122"/>
                 <a:cs typeface="맑은 고딕" pitchFamily="34" charset="-120"/>
               </a:rPr>
-              <a:t>아래 금액은 특허 1건 기준이며, 발명자가 2명 이상인 경우 발명신고서에 기재된 기여율로 분배합니다.</a:t>
+              <a:t>보상은 국내 출원 시와 국내 등록 시 두 차례 지급하며, 아래 금액은 특허 1건 기준입니다.</a:t>
             </a:r>
             <a:endParaRPr lang="en-US" sz="1150" dirty="0"/>
           </a:p>
@@ -14517,7 +14290,7 @@
         </p:nvSpPr>
         <p:spPr>
           <a:xfrm>
-            <a:off x="914400" y="1938528"/>
+            <a:off x="914400" y="1920240"/>
             <a:ext cx="10360152" cy="347472"/>
           </a:xfrm>
           <a:prstGeom prst="roundRect">
@@ -14544,7 +14317,7 @@
         </p:nvSpPr>
         <p:spPr>
           <a:xfrm>
-            <a:off x="914400" y="1938528"/>
+            <a:off x="914400" y="1920240"/>
             <a:ext cx="10360152" cy="347472"/>
           </a:xfrm>
           <a:prstGeom prst="rect">
@@ -14590,7 +14363,7 @@
           </p:nvPr>
         </p:nvGraphicFramePr>
         <p:xfrm>
-          <a:off x="914400" y="2450592"/>
+          <a:off x="914400" y="2395728"/>
           <a:ext cx="10360152" cy="914400"/>
         </p:xfrm>
         <a:graphic>
@@ -14604,7 +14377,7 @@
                 <a:gridCol w="1792224"/>
                 <a:gridCol w="1792224"/>
               </a:tblGrid>
-              <a:tr h="457200">
+              <a:tr h="493776">
                 <a:tc>
                   <a:txBody>
                     <a:bodyPr/>
@@ -14946,7 +14719,7 @@
                   </a:tcPr>
                 </a:tc>
               </a:tr>
-              <a:tr h="457200">
+              <a:tr h="493776">
                 <a:tc>
                   <a:txBody>
                     <a:bodyPr/>
@@ -15288,7 +15061,7 @@
                   </a:tcPr>
                 </a:tc>
               </a:tr>
-              <a:tr h="457200">
+              <a:tr h="493776">
                 <a:tc>
                   <a:txBody>
                     <a:bodyPr/>
@@ -15630,7 +15403,7 @@
                   </a:tcPr>
                 </a:tc>
               </a:tr>
-              <a:tr h="457200">
+              <a:tr h="493776">
                 <a:tc>
                   <a:txBody>
                     <a:bodyPr/>
@@ -15648,7 +15421,7 @@
                           <a:ea typeface="맑은 고딕" pitchFamily="34" charset="-122"/>
                           <a:cs typeface="맑은 고딕" pitchFamily="34" charset="-120"/>
                         </a:rPr>
-                        <a:t>출원유보보상금</a:t>
+                        <a:t>합       계</a:t>
                       </a:r>
                       <a:endParaRPr lang="en-US" sz="1100" dirty="0">
                         <a:latin typeface="맑은 고딕" charset="0"/>
@@ -15695,7 +15468,7 @@
                       <a:tailEnd type="none" w="med" len="med"/>
                     </a:lnB>
                     <a:solidFill>
-                      <a:srgbClr val="FFFFFF"/>
+                      <a:srgbClr val="E8F0FA"/>
                     </a:solidFill>
                   </a:tcPr>
                 </a:tc>
@@ -15708,15 +15481,15 @@
                         <a:buNone/>
                       </a:pPr>
                       <a:r>
-                        <a:rPr lang="en-US" sz="1100" dirty="0">
+                        <a:rPr lang="en-US" sz="1100" b="1" dirty="0">
                           <a:solidFill>
-                            <a:srgbClr val="333333"/>
+                            <a:srgbClr val="10173A"/>
                           </a:solidFill>
                           <a:latin typeface="맑은 고딕" pitchFamily="34" charset="0"/>
                           <a:ea typeface="맑은 고딕" pitchFamily="34" charset="-122"/>
                           <a:cs typeface="맑은 고딕" pitchFamily="34" charset="-120"/>
                         </a:rPr>
-                        <a:t>유보·포기 결정일</a:t>
+                        <a:t>특허 1건 기준</a:t>
                       </a:r>
                       <a:endParaRPr lang="en-US" sz="1100" dirty="0">
                         <a:latin typeface="맑은 고딕" charset="0"/>
@@ -15763,7 +15536,7 @@
                       <a:tailEnd type="none" w="med" len="med"/>
                     </a:lnB>
                     <a:solidFill>
-                      <a:srgbClr val="FFFFFF"/>
+                      <a:srgbClr val="E8F0FA"/>
                     </a:solidFill>
                   </a:tcPr>
                 </a:tc>
@@ -15784,7 +15557,7 @@
                           <a:ea typeface="맑은 고딕" pitchFamily="34" charset="-122"/>
                           <a:cs typeface="맑은 고딕" pitchFamily="34" charset="-120"/>
                         </a:rPr>
-                        <a:t>75만원</a:t>
+                        <a:t>300만원</a:t>
                       </a:r>
                       <a:endParaRPr lang="en-US" sz="1100" dirty="0">
                         <a:latin typeface="맑은 고딕" charset="0"/>
@@ -15831,7 +15604,7 @@
                       <a:tailEnd type="none" w="med" len="med"/>
                     </a:lnB>
                     <a:solidFill>
-                      <a:srgbClr val="FFFFFF"/>
+                      <a:srgbClr val="E8F0FA"/>
                     </a:solidFill>
                   </a:tcPr>
                 </a:tc>
@@ -15844,15 +15617,15 @@
                         <a:buNone/>
                       </a:pPr>
                       <a:r>
-                        <a:rPr lang="en-US" sz="1100" dirty="0">
+                        <a:rPr lang="en-US" sz="1100" b="1" dirty="0">
                           <a:solidFill>
-                            <a:srgbClr val="333333"/>
+                            <a:srgbClr val="10173A"/>
                           </a:solidFill>
                           <a:latin typeface="맑은 고딕" pitchFamily="34" charset="0"/>
                           <a:ea typeface="맑은 고딕" pitchFamily="34" charset="-122"/>
                           <a:cs typeface="맑은 고딕" pitchFamily="34" charset="-120"/>
                         </a:rPr>
-                        <a:t>50만원</a:t>
+                        <a:t>200만원</a:t>
                       </a:r>
                       <a:endParaRPr lang="en-US" sz="1100" dirty="0">
                         <a:latin typeface="맑은 고딕" charset="0"/>
@@ -15899,7 +15672,7 @@
                       <a:tailEnd type="none" w="med" len="med"/>
                     </a:lnB>
                     <a:solidFill>
-                      <a:srgbClr val="FFFFFF"/>
+                      <a:srgbClr val="E8F0FA"/>
                     </a:solidFill>
                   </a:tcPr>
                 </a:tc>
@@ -15912,15 +15685,15 @@
                         <a:buNone/>
                       </a:pPr>
                       <a:r>
-                        <a:rPr lang="en-US" sz="1100" dirty="0">
+                        <a:rPr lang="en-US" sz="1100" b="1" dirty="0">
                           <a:solidFill>
-                            <a:srgbClr val="333333"/>
+                            <a:srgbClr val="10173A"/>
                           </a:solidFill>
                           <a:latin typeface="맑은 고딕" pitchFamily="34" charset="0"/>
                           <a:ea typeface="맑은 고딕" pitchFamily="34" charset="-122"/>
                           <a:cs typeface="맑은 고딕" pitchFamily="34" charset="-120"/>
                         </a:rPr>
-                        <a:t>25만원</a:t>
+                        <a:t>100만원</a:t>
                       </a:r>
                       <a:endParaRPr lang="en-US" sz="1100" dirty="0">
                         <a:latin typeface="맑은 고딕" charset="0"/>
@@ -15967,433 +15740,9 @@
                       <a:tailEnd type="none" w="med" len="med"/>
                     </a:lnB>
                     <a:solidFill>
-                      <a:srgbClr val="FFFFFF"/>
+                      <a:srgbClr val="E8F0FA"/>
                     </a:solidFill>
                   </a:tcPr>
-                </a:tc>
-              </a:tr>
-              <a:tr h="457200">
-                <a:tc>
-                  <a:txBody>
-                    <a:bodyPr/>
-                    <a:lstStyle/>
-                    <a:p>
-                      <a:pPr algn="l" indent="0" marL="0">
-                        <a:buNone/>
-                      </a:pPr>
-                      <a:r>
-                        <a:rPr lang="en-US" sz="1100" b="1" dirty="0">
-                          <a:solidFill>
-                            <a:srgbClr val="10173A"/>
-                          </a:solidFill>
-                          <a:latin typeface="맑은 고딕" pitchFamily="34" charset="0"/>
-                          <a:ea typeface="맑은 고딕" pitchFamily="34" charset="-122"/>
-                          <a:cs typeface="맑은 고딕" pitchFamily="34" charset="-120"/>
-                        </a:rPr>
-                        <a:t>해외출원보상금</a:t>
-                      </a:r>
-                      <a:endParaRPr lang="en-US" sz="1100" dirty="0">
-                        <a:latin typeface="맑은 고딕" charset="0"/>
-                        <a:ea typeface="맑은 고딕" charset="0"/>
-                        <a:cs typeface="맑은 고딕" charset="0"/>
-                      </a:endParaRPr>
-                    </a:p>
-                  </a:txBody>
-                  <a:tcPr marL="91440" marR="91440" marT="45720" marB="45720" anchor="ctr">
-                    <a:lnL w="12700" cap="flat" cmpd="sng" algn="ctr">
-                      <a:solidFill>
-                        <a:srgbClr val="C9D8EC"/>
-                      </a:solidFill>
-                      <a:prstDash val="solid"/>
-                      <a:round/>
-                      <a:headEnd type="none" w="med" len="med"/>
-                      <a:tailEnd type="none" w="med" len="med"/>
-                    </a:lnL>
-                    <a:lnR w="12700" cap="flat" cmpd="sng" algn="ctr">
-                      <a:solidFill>
-                        <a:srgbClr val="C9D8EC"/>
-                      </a:solidFill>
-                      <a:prstDash val="solid"/>
-                      <a:round/>
-                      <a:headEnd type="none" w="med" len="med"/>
-                      <a:tailEnd type="none" w="med" len="med"/>
-                    </a:lnR>
-                    <a:lnT w="12700" cap="flat" cmpd="sng" algn="ctr">
-                      <a:solidFill>
-                        <a:srgbClr val="C9D8EC"/>
-                      </a:solidFill>
-                      <a:prstDash val="solid"/>
-                      <a:round/>
-                      <a:headEnd type="none" w="med" len="med"/>
-                      <a:tailEnd type="none" w="med" len="med"/>
-                    </a:lnT>
-                    <a:lnB w="12700" cap="flat" cmpd="sng" algn="ctr">
-                      <a:solidFill>
-                        <a:srgbClr val="C9D8EC"/>
-                      </a:solidFill>
-                      <a:prstDash val="solid"/>
-                      <a:round/>
-                      <a:headEnd type="none" w="med" len="med"/>
-                      <a:tailEnd type="none" w="med" len="med"/>
-                    </a:lnB>
-                    <a:solidFill>
-                      <a:srgbClr val="FFFFFF"/>
-                    </a:solidFill>
-                  </a:tcPr>
-                </a:tc>
-                <a:tc>
-                  <a:txBody>
-                    <a:bodyPr/>
-                    <a:lstStyle/>
-                    <a:p>
-                      <a:pPr algn="ctr" indent="0" marL="0">
-                        <a:buNone/>
-                      </a:pPr>
-                      <a:r>
-                        <a:rPr lang="en-US" sz="1100" dirty="0">
-                          <a:solidFill>
-                            <a:srgbClr val="333333"/>
-                          </a:solidFill>
-                          <a:latin typeface="맑은 고딕" pitchFamily="34" charset="0"/>
-                          <a:ea typeface="맑은 고딕" pitchFamily="34" charset="-122"/>
-                          <a:cs typeface="맑은 고딕" pitchFamily="34" charset="-120"/>
-                        </a:rPr>
-                        <a:t>해외 출원일</a:t>
-                      </a:r>
-                      <a:endParaRPr lang="en-US" sz="1100" dirty="0">
-                        <a:latin typeface="맑은 고딕" charset="0"/>
-                        <a:ea typeface="맑은 고딕" charset="0"/>
-                        <a:cs typeface="맑은 고딕" charset="0"/>
-                      </a:endParaRPr>
-                    </a:p>
-                  </a:txBody>
-                  <a:tcPr marL="91440" marR="91440" marT="45720" marB="45720" anchor="ctr">
-                    <a:lnL w="12700" cap="flat" cmpd="sng" algn="ctr">
-                      <a:solidFill>
-                        <a:srgbClr val="C9D8EC"/>
-                      </a:solidFill>
-                      <a:prstDash val="solid"/>
-                      <a:round/>
-                      <a:headEnd type="none" w="med" len="med"/>
-                      <a:tailEnd type="none" w="med" len="med"/>
-                    </a:lnL>
-                    <a:lnR w="12700" cap="flat" cmpd="sng" algn="ctr">
-                      <a:solidFill>
-                        <a:srgbClr val="C9D8EC"/>
-                      </a:solidFill>
-                      <a:prstDash val="solid"/>
-                      <a:round/>
-                      <a:headEnd type="none" w="med" len="med"/>
-                      <a:tailEnd type="none" w="med" len="med"/>
-                    </a:lnR>
-                    <a:lnT w="12700" cap="flat" cmpd="sng" algn="ctr">
-                      <a:solidFill>
-                        <a:srgbClr val="C9D8EC"/>
-                      </a:solidFill>
-                      <a:prstDash val="solid"/>
-                      <a:round/>
-                      <a:headEnd type="none" w="med" len="med"/>
-                      <a:tailEnd type="none" w="med" len="med"/>
-                    </a:lnT>
-                    <a:lnB w="12700" cap="flat" cmpd="sng" algn="ctr">
-                      <a:solidFill>
-                        <a:srgbClr val="C9D8EC"/>
-                      </a:solidFill>
-                      <a:prstDash val="solid"/>
-                      <a:round/>
-                      <a:headEnd type="none" w="med" len="med"/>
-                      <a:tailEnd type="none" w="med" len="med"/>
-                    </a:lnB>
-                    <a:solidFill>
-                      <a:srgbClr val="FFFFFF"/>
-                    </a:solidFill>
-                  </a:tcPr>
-                </a:tc>
-                <a:tc gridSpan="3">
-                  <a:txBody>
-                    <a:bodyPr/>
-                    <a:lstStyle/>
-                    <a:p>
-                      <a:pPr algn="ctr" indent="0" marL="0">
-                        <a:buNone/>
-                      </a:pPr>
-                      <a:r>
-                        <a:rPr lang="en-US" sz="1100" b="1" dirty="0">
-                          <a:solidFill>
-                            <a:srgbClr val="10173A"/>
-                          </a:solidFill>
-                          <a:latin typeface="맑은 고딕" pitchFamily="34" charset="0"/>
-                          <a:ea typeface="맑은 고딕" pitchFamily="34" charset="-122"/>
-                          <a:cs typeface="맑은 고딕" pitchFamily="34" charset="-120"/>
-                        </a:rPr>
-                        <a:t>국가당 50만원  (등급 무관)</a:t>
-                      </a:r>
-                      <a:endParaRPr lang="en-US" sz="1100" dirty="0">
-                        <a:latin typeface="맑은 고딕" charset="0"/>
-                        <a:ea typeface="맑은 고딕" charset="0"/>
-                        <a:cs typeface="맑은 고딕" charset="0"/>
-                      </a:endParaRPr>
-                    </a:p>
-                  </a:txBody>
-                  <a:tcPr marL="91440" marR="91440" marT="45720" marB="45720" anchor="ctr">
-                    <a:lnL w="12700" cap="flat" cmpd="sng" algn="ctr">
-                      <a:solidFill>
-                        <a:srgbClr val="C9D8EC"/>
-                      </a:solidFill>
-                      <a:prstDash val="solid"/>
-                      <a:round/>
-                      <a:headEnd type="none" w="med" len="med"/>
-                      <a:tailEnd type="none" w="med" len="med"/>
-                    </a:lnL>
-                    <a:lnR w="12700" cap="flat" cmpd="sng" algn="ctr">
-                      <a:solidFill>
-                        <a:srgbClr val="C9D8EC"/>
-                      </a:solidFill>
-                      <a:prstDash val="solid"/>
-                      <a:round/>
-                      <a:headEnd type="none" w="med" len="med"/>
-                      <a:tailEnd type="none" w="med" len="med"/>
-                    </a:lnR>
-                    <a:lnT w="12700" cap="flat" cmpd="sng" algn="ctr">
-                      <a:solidFill>
-                        <a:srgbClr val="C9D8EC"/>
-                      </a:solidFill>
-                      <a:prstDash val="solid"/>
-                      <a:round/>
-                      <a:headEnd type="none" w="med" len="med"/>
-                      <a:tailEnd type="none" w="med" len="med"/>
-                    </a:lnT>
-                    <a:lnB w="12700" cap="flat" cmpd="sng" algn="ctr">
-                      <a:solidFill>
-                        <a:srgbClr val="C9D8EC"/>
-                      </a:solidFill>
-                      <a:prstDash val="solid"/>
-                      <a:round/>
-                      <a:headEnd type="none" w="med" len="med"/>
-                      <a:tailEnd type="none" w="med" len="med"/>
-                    </a:lnB>
-                    <a:solidFill>
-                      <a:srgbClr val="F3F7FB"/>
-                    </a:solidFill>
-                  </a:tcPr>
-                </a:tc>
-                <a:tc hMerge="1">
-                  <a:tcPr/>
-                </a:tc>
-                <a:tc hMerge="1">
-                  <a:tcPr/>
-                </a:tc>
-              </a:tr>
-              <a:tr h="457200">
-                <a:tc>
-                  <a:txBody>
-                    <a:bodyPr/>
-                    <a:lstStyle/>
-                    <a:p>
-                      <a:pPr algn="l" indent="0" marL="0">
-                        <a:buNone/>
-                      </a:pPr>
-                      <a:r>
-                        <a:rPr lang="en-US" sz="1100" b="1" dirty="0">
-                          <a:solidFill>
-                            <a:srgbClr val="10173A"/>
-                          </a:solidFill>
-                          <a:latin typeface="맑은 고딕" pitchFamily="34" charset="0"/>
-                          <a:ea typeface="맑은 고딕" pitchFamily="34" charset="-122"/>
-                          <a:cs typeface="맑은 고딕" pitchFamily="34" charset="-120"/>
-                        </a:rPr>
-                        <a:t>처분·실시보상금</a:t>
-                      </a:r>
-                      <a:endParaRPr lang="en-US" sz="1100" dirty="0">
-                        <a:latin typeface="맑은 고딕" charset="0"/>
-                        <a:ea typeface="맑은 고딕" charset="0"/>
-                        <a:cs typeface="맑은 고딕" charset="0"/>
-                      </a:endParaRPr>
-                    </a:p>
-                  </a:txBody>
-                  <a:tcPr marL="91440" marR="91440" marT="45720" marB="45720" anchor="ctr">
-                    <a:lnL w="12700" cap="flat" cmpd="sng" algn="ctr">
-                      <a:solidFill>
-                        <a:srgbClr val="C9D8EC"/>
-                      </a:solidFill>
-                      <a:prstDash val="solid"/>
-                      <a:round/>
-                      <a:headEnd type="none" w="med" len="med"/>
-                      <a:tailEnd type="none" w="med" len="med"/>
-                    </a:lnL>
-                    <a:lnR w="12700" cap="flat" cmpd="sng" algn="ctr">
-                      <a:solidFill>
-                        <a:srgbClr val="C9D8EC"/>
-                      </a:solidFill>
-                      <a:prstDash val="solid"/>
-                      <a:round/>
-                      <a:headEnd type="none" w="med" len="med"/>
-                      <a:tailEnd type="none" w="med" len="med"/>
-                    </a:lnR>
-                    <a:lnT w="12700" cap="flat" cmpd="sng" algn="ctr">
-                      <a:solidFill>
-                        <a:srgbClr val="C9D8EC"/>
-                      </a:solidFill>
-                      <a:prstDash val="solid"/>
-                      <a:round/>
-                      <a:headEnd type="none" w="med" len="med"/>
-                      <a:tailEnd type="none" w="med" len="med"/>
-                    </a:lnT>
-                    <a:lnB w="12700" cap="flat" cmpd="sng" algn="ctr">
-                      <a:solidFill>
-                        <a:srgbClr val="C9D8EC"/>
-                      </a:solidFill>
-                      <a:prstDash val="solid"/>
-                      <a:round/>
-                      <a:headEnd type="none" w="med" len="med"/>
-                      <a:tailEnd type="none" w="med" len="med"/>
-                    </a:lnB>
-                    <a:solidFill>
-                      <a:srgbClr val="FFFFFF"/>
-                    </a:solidFill>
-                  </a:tcPr>
-                </a:tc>
-                <a:tc>
-                  <a:txBody>
-                    <a:bodyPr/>
-                    <a:lstStyle/>
-                    <a:p>
-                      <a:pPr algn="ctr" indent="0" marL="0">
-                        <a:buNone/>
-                      </a:pPr>
-                      <a:r>
-                        <a:rPr lang="en-US" sz="1100" dirty="0">
-                          <a:solidFill>
-                            <a:srgbClr val="333333"/>
-                          </a:solidFill>
-                          <a:latin typeface="맑은 고딕" pitchFamily="34" charset="0"/>
-                          <a:ea typeface="맑은 고딕" pitchFamily="34" charset="-122"/>
-                          <a:cs typeface="맑은 고딕" pitchFamily="34" charset="-120"/>
-                        </a:rPr>
-                        <a:t>수익 발생 연도 종료 후 3개월 내</a:t>
-                      </a:r>
-                      <a:endParaRPr lang="en-US" sz="1100" dirty="0">
-                        <a:latin typeface="맑은 고딕" charset="0"/>
-                        <a:ea typeface="맑은 고딕" charset="0"/>
-                        <a:cs typeface="맑은 고딕" charset="0"/>
-                      </a:endParaRPr>
-                    </a:p>
-                  </a:txBody>
-                  <a:tcPr marL="91440" marR="91440" marT="45720" marB="45720" anchor="ctr">
-                    <a:lnL w="12700" cap="flat" cmpd="sng" algn="ctr">
-                      <a:solidFill>
-                        <a:srgbClr val="C9D8EC"/>
-                      </a:solidFill>
-                      <a:prstDash val="solid"/>
-                      <a:round/>
-                      <a:headEnd type="none" w="med" len="med"/>
-                      <a:tailEnd type="none" w="med" len="med"/>
-                    </a:lnL>
-                    <a:lnR w="12700" cap="flat" cmpd="sng" algn="ctr">
-                      <a:solidFill>
-                        <a:srgbClr val="C9D8EC"/>
-                      </a:solidFill>
-                      <a:prstDash val="solid"/>
-                      <a:round/>
-                      <a:headEnd type="none" w="med" len="med"/>
-                      <a:tailEnd type="none" w="med" len="med"/>
-                    </a:lnR>
-                    <a:lnT w="12700" cap="flat" cmpd="sng" algn="ctr">
-                      <a:solidFill>
-                        <a:srgbClr val="C9D8EC"/>
-                      </a:solidFill>
-                      <a:prstDash val="solid"/>
-                      <a:round/>
-                      <a:headEnd type="none" w="med" len="med"/>
-                      <a:tailEnd type="none" w="med" len="med"/>
-                    </a:lnT>
-                    <a:lnB w="12700" cap="flat" cmpd="sng" algn="ctr">
-                      <a:solidFill>
-                        <a:srgbClr val="C9D8EC"/>
-                      </a:solidFill>
-                      <a:prstDash val="solid"/>
-                      <a:round/>
-                      <a:headEnd type="none" w="med" len="med"/>
-                      <a:tailEnd type="none" w="med" len="med"/>
-                    </a:lnB>
-                    <a:solidFill>
-                      <a:srgbClr val="FFFFFF"/>
-                    </a:solidFill>
-                  </a:tcPr>
-                </a:tc>
-                <a:tc gridSpan="3">
-                  <a:txBody>
-                    <a:bodyPr/>
-                    <a:lstStyle/>
-                    <a:p>
-                      <a:pPr algn="ctr" indent="0" marL="0">
-                        <a:buNone/>
-                      </a:pPr>
-                      <a:r>
-                        <a:rPr lang="en-US" sz="1100" b="1" dirty="0">
-                          <a:solidFill>
-                            <a:srgbClr val="10173A"/>
-                          </a:solidFill>
-                          <a:latin typeface="맑은 고딕" pitchFamily="34" charset="0"/>
-                          <a:ea typeface="맑은 고딕" pitchFamily="34" charset="-122"/>
-                          <a:cs typeface="맑은 고딕" pitchFamily="34" charset="-120"/>
-                        </a:rPr>
-                        <a:t>순수익의 10%  (등급 무관)</a:t>
-                      </a:r>
-                      <a:endParaRPr lang="en-US" sz="1100" dirty="0">
-                        <a:latin typeface="맑은 고딕" charset="0"/>
-                        <a:ea typeface="맑은 고딕" charset="0"/>
-                        <a:cs typeface="맑은 고딕" charset="0"/>
-                      </a:endParaRPr>
-                    </a:p>
-                  </a:txBody>
-                  <a:tcPr marL="91440" marR="91440" marT="45720" marB="45720" anchor="ctr">
-                    <a:lnL w="12700" cap="flat" cmpd="sng" algn="ctr">
-                      <a:solidFill>
-                        <a:srgbClr val="C9D8EC"/>
-                      </a:solidFill>
-                      <a:prstDash val="solid"/>
-                      <a:round/>
-                      <a:headEnd type="none" w="med" len="med"/>
-                      <a:tailEnd type="none" w="med" len="med"/>
-                    </a:lnL>
-                    <a:lnR w="12700" cap="flat" cmpd="sng" algn="ctr">
-                      <a:solidFill>
-                        <a:srgbClr val="C9D8EC"/>
-                      </a:solidFill>
-                      <a:prstDash val="solid"/>
-                      <a:round/>
-                      <a:headEnd type="none" w="med" len="med"/>
-                      <a:tailEnd type="none" w="med" len="med"/>
-                    </a:lnR>
-                    <a:lnT w="12700" cap="flat" cmpd="sng" algn="ctr">
-                      <a:solidFill>
-                        <a:srgbClr val="C9D8EC"/>
-                      </a:solidFill>
-                      <a:prstDash val="solid"/>
-                      <a:round/>
-                      <a:headEnd type="none" w="med" len="med"/>
-                      <a:tailEnd type="none" w="med" len="med"/>
-                    </a:lnT>
-                    <a:lnB w="12700" cap="flat" cmpd="sng" algn="ctr">
-                      <a:solidFill>
-                        <a:srgbClr val="C9D8EC"/>
-                      </a:solidFill>
-                      <a:prstDash val="solid"/>
-                      <a:round/>
-                      <a:headEnd type="none" w="med" len="med"/>
-                      <a:tailEnd type="none" w="med" len="med"/>
-                    </a:lnB>
-                    <a:solidFill>
-                      <a:srgbClr val="F3F7FB"/>
-                    </a:solidFill>
-                  </a:tcPr>
-                </a:tc>
-                <a:tc hMerge="1">
-                  <a:tcPr/>
-                </a:tc>
-                <a:tc hMerge="1">
-                  <a:tcPr/>
                 </a:tc>
               </a:tr>
             </a:tbl>
@@ -16408,14 +15757,78 @@
         </p:nvSpPr>
         <p:spPr>
           <a:xfrm>
-            <a:off x="914400" y="5266944"/>
-            <a:ext cx="1417320" cy="274320"/>
+            <a:off x="914400" y="4608576"/>
+            <a:ext cx="2425446" cy="384048"/>
           </a:xfrm>
           <a:prstGeom prst="rect">
             <a:avLst/>
           </a:prstGeom>
           <a:solidFill>
-            <a:srgbClr val="E8F0FA"/>
+            <a:srgbClr val="1C67C7"/>
+          </a:solidFill>
+          <a:ln w="12700">
+            <a:solidFill>
+              <a:srgbClr val="1C67C7"/>
+            </a:solidFill>
+            <a:prstDash val="solid"/>
+          </a:ln>
+        </p:spPr>
+      </p:sp>
+      <p:sp>
+        <p:nvSpPr>
+          <p:cNvPr id="9" name="Text 6"/>
+          <p:cNvSpPr txBox="1"/>
+          <p:nvPr/>
+        </p:nvSpPr>
+        <p:spPr>
+          <a:xfrm>
+            <a:off x="987552" y="4608576"/>
+            <a:ext cx="2279142" cy="384048"/>
+          </a:xfrm>
+          <a:prstGeom prst="rect">
+            <a:avLst/>
+          </a:prstGeom>
+          <a:noFill/>
+          <a:ln/>
+        </p:spPr>
+        <p:txBody>
+          <a:bodyPr wrap="square" lIns="0" tIns="0" rIns="0" bIns="0" rtlCol="0" anchor="ctr"/>
+          <a:lstStyle/>
+          <a:p>
+            <a:pPr algn="ctr" indent="0" marL="0">
+              <a:buNone/>
+            </a:pPr>
+            <a:r>
+              <a:rPr lang="en-US" sz="1100" b="1" dirty="0">
+                <a:solidFill>
+                  <a:srgbClr val="FFFFFF"/>
+                </a:solidFill>
+                <a:latin typeface="맑은 고딕" pitchFamily="34" charset="0"/>
+                <a:ea typeface="맑은 고딕" pitchFamily="34" charset="-122"/>
+                <a:cs typeface="맑은 고딕" pitchFamily="34" charset="-120"/>
+              </a:rPr>
+              <a:t>공동발명 분배 (제7조)</a:t>
+            </a:r>
+            <a:endParaRPr lang="en-US" sz="1100" dirty="0"/>
+          </a:p>
+        </p:txBody>
+      </p:sp>
+      <p:sp>
+        <p:nvSpPr>
+          <p:cNvPr id="10" name="Shape 7"/>
+          <p:cNvSpPr/>
+          <p:nvPr/>
+        </p:nvSpPr>
+        <p:spPr>
+          <a:xfrm>
+            <a:off x="914400" y="4992624"/>
+            <a:ext cx="2425446" cy="877824"/>
+          </a:xfrm>
+          <a:prstGeom prst="rect">
+            <a:avLst/>
+          </a:prstGeom>
+          <a:solidFill>
+            <a:srgbClr val="FFFFFF"/>
           </a:solidFill>
           <a:ln w="12700">
             <a:solidFill>
@@ -16427,14 +15840,81 @@
       </p:sp>
       <p:sp>
         <p:nvSpPr>
-          <p:cNvPr id="9" name="Text 6"/>
-          <p:cNvSpPr txBox="1"/>
-          <p:nvPr/>
-        </p:nvSpPr>
-        <p:spPr>
-          <a:xfrm>
-            <a:off x="914400" y="5266944"/>
-            <a:ext cx="1417320" cy="274320"/>
+          <p:cNvPr id="11" name="Text 8"/>
+          <p:cNvSpPr txBox="1"/>
+          <p:nvPr/>
+        </p:nvSpPr>
+        <p:spPr>
+          <a:xfrm>
+            <a:off x="1060704" y="4992624"/>
+            <a:ext cx="2132838" cy="877824"/>
+          </a:xfrm>
+          <a:prstGeom prst="rect">
+            <a:avLst/>
+          </a:prstGeom>
+          <a:noFill/>
+          <a:ln/>
+        </p:spPr>
+        <p:txBody>
+          <a:bodyPr wrap="square" lIns="0" tIns="0" rIns="0" bIns="0" rtlCol="0" anchor="ctr"/>
+          <a:lstStyle/>
+          <a:p>
+            <a:pPr indent="0" marL="0">
+              <a:lnSpc>
+                <a:spcPts val="1500"/>
+              </a:lnSpc>
+              <a:buNone/>
+            </a:pPr>
+            <a:r>
+              <a:rPr lang="en-US" sz="1000" dirty="0">
+                <a:solidFill>
+                  <a:srgbClr val="333333"/>
+                </a:solidFill>
+                <a:latin typeface="맑은 고딕" pitchFamily="34" charset="0"/>
+                <a:ea typeface="맑은 고딕" pitchFamily="34" charset="-122"/>
+                <a:cs typeface="맑은 고딕" pitchFamily="34" charset="-120"/>
+              </a:rPr>
+              <a:t>발명자가 2명 이상인 경우 발명신고서에 기재된 기여율에 따라 분배하며, 합계액은 건당 보상액을 초과하지 않습니다.</a:t>
+            </a:r>
+            <a:endParaRPr lang="en-US" sz="1000" dirty="0"/>
+          </a:p>
+        </p:txBody>
+      </p:sp>
+      <p:sp>
+        <p:nvSpPr>
+          <p:cNvPr id="12" name="Shape 9"/>
+          <p:cNvSpPr/>
+          <p:nvPr/>
+        </p:nvSpPr>
+        <p:spPr>
+          <a:xfrm>
+            <a:off x="3559302" y="4608576"/>
+            <a:ext cx="2425446" cy="384048"/>
+          </a:xfrm>
+          <a:prstGeom prst="rect">
+            <a:avLst/>
+          </a:prstGeom>
+          <a:solidFill>
+            <a:srgbClr val="1C67C7"/>
+          </a:solidFill>
+          <a:ln w="12700">
+            <a:solidFill>
+              <a:srgbClr val="1C67C7"/>
+            </a:solidFill>
+            <a:prstDash val="solid"/>
+          </a:ln>
+        </p:spPr>
+      </p:sp>
+      <p:sp>
+        <p:nvSpPr>
+          <p:cNvPr id="13" name="Text 10"/>
+          <p:cNvSpPr txBox="1"/>
+          <p:nvPr/>
+        </p:nvSpPr>
+        <p:spPr>
+          <a:xfrm>
+            <a:off x="3632454" y="4608576"/>
+            <a:ext cx="2279142" cy="384048"/>
           </a:xfrm>
           <a:prstGeom prst="rect">
             <a:avLst/>
@@ -16450,75 +15930,36 @@
               <a:buNone/>
             </a:pPr>
             <a:r>
-              <a:rPr lang="en-US" sz="1000" b="1" dirty="0">
-                <a:solidFill>
-                  <a:srgbClr val="10173A"/>
-                </a:solidFill>
-                <a:latin typeface="맑은 고딕" pitchFamily="34" charset="0"/>
-                <a:ea typeface="맑은 고딕" pitchFamily="34" charset="-122"/>
-                <a:cs typeface="맑은 고딕" pitchFamily="34" charset="-120"/>
-              </a:rPr>
-              <a:t>출원보상금</a:t>
-            </a:r>
-            <a:endParaRPr lang="en-US" sz="1000" dirty="0"/>
-          </a:p>
-        </p:txBody>
-      </p:sp>
-      <p:sp>
-        <p:nvSpPr>
-          <p:cNvPr id="10" name="Text 7"/>
-          <p:cNvSpPr txBox="1"/>
-          <p:nvPr/>
-        </p:nvSpPr>
-        <p:spPr>
-          <a:xfrm>
-            <a:off x="2514600" y="5266944"/>
-            <a:ext cx="8759952" cy="274320"/>
-          </a:xfrm>
-          <a:prstGeom prst="rect">
-            <a:avLst/>
-          </a:prstGeom>
-          <a:noFill/>
-          <a:ln/>
-        </p:spPr>
-        <p:txBody>
-          <a:bodyPr wrap="square" lIns="0" tIns="0" rIns="0" bIns="0" rtlCol="0" anchor="ctr"/>
-          <a:lstStyle/>
-          <a:p>
-            <a:pPr indent="0" marL="0">
-              <a:buNone/>
-            </a:pPr>
-            <a:r>
-              <a:rPr lang="en-US" sz="1000" dirty="0">
-                <a:solidFill>
-                  <a:srgbClr val="333333"/>
-                </a:solidFill>
-                <a:latin typeface="맑은 고딕" pitchFamily="34" charset="0"/>
-                <a:ea typeface="맑은 고딕" pitchFamily="34" charset="-122"/>
-                <a:cs typeface="맑은 고딕" pitchFamily="34" charset="-120"/>
-              </a:rPr>
-              <a:t>등록 여부와 무관하게 지급하며, 등록 거절·취하 시에도 회수하지 않습니다. 분할·계속출원에 대하여는 중복 지급하지 않습니다.</a:t>
-            </a:r>
-            <a:endParaRPr lang="en-US" sz="1000" dirty="0"/>
-          </a:p>
-        </p:txBody>
-      </p:sp>
-      <p:sp>
-        <p:nvSpPr>
-          <p:cNvPr id="11" name="Shape 8"/>
+              <a:rPr lang="en-US" sz="1100" b="1" dirty="0">
+                <a:solidFill>
+                  <a:srgbClr val="FFFFFF"/>
+                </a:solidFill>
+                <a:latin typeface="맑은 고딕" pitchFamily="34" charset="0"/>
+                <a:ea typeface="맑은 고딕" pitchFamily="34" charset="-122"/>
+                <a:cs typeface="맑은 고딕" pitchFamily="34" charset="-120"/>
+              </a:rPr>
+              <a:t>출원보상금의 성격 (제5조)</a:t>
+            </a:r>
+            <a:endParaRPr lang="en-US" sz="1100" dirty="0"/>
+          </a:p>
+        </p:txBody>
+      </p:sp>
+      <p:sp>
+        <p:nvSpPr>
+          <p:cNvPr id="14" name="Shape 11"/>
           <p:cNvSpPr/>
           <p:nvPr/>
         </p:nvSpPr>
         <p:spPr>
           <a:xfrm>
-            <a:off x="914400" y="5614416"/>
-            <a:ext cx="1417320" cy="274320"/>
+            <a:off x="3559302" y="4992624"/>
+            <a:ext cx="2425446" cy="877824"/>
           </a:xfrm>
           <a:prstGeom prst="rect">
             <a:avLst/>
           </a:prstGeom>
           <a:solidFill>
-            <a:srgbClr val="E8F0FA"/>
+            <a:srgbClr val="FFFFFF"/>
           </a:solidFill>
           <a:ln w="12700">
             <a:solidFill>
@@ -16530,14 +15971,81 @@
       </p:sp>
       <p:sp>
         <p:nvSpPr>
-          <p:cNvPr id="12" name="Text 9"/>
-          <p:cNvSpPr txBox="1"/>
-          <p:nvPr/>
-        </p:nvSpPr>
-        <p:spPr>
-          <a:xfrm>
-            <a:off x="914400" y="5614416"/>
-            <a:ext cx="1417320" cy="274320"/>
+          <p:cNvPr id="15" name="Text 12"/>
+          <p:cNvSpPr txBox="1"/>
+          <p:nvPr/>
+        </p:nvSpPr>
+        <p:spPr>
+          <a:xfrm>
+            <a:off x="3705606" y="4992624"/>
+            <a:ext cx="2132838" cy="877824"/>
+          </a:xfrm>
+          <a:prstGeom prst="rect">
+            <a:avLst/>
+          </a:prstGeom>
+          <a:noFill/>
+          <a:ln/>
+        </p:spPr>
+        <p:txBody>
+          <a:bodyPr wrap="square" lIns="0" tIns="0" rIns="0" bIns="0" rtlCol="0" anchor="ctr"/>
+          <a:lstStyle/>
+          <a:p>
+            <a:pPr indent="0" marL="0">
+              <a:lnSpc>
+                <a:spcPts val="1500"/>
+              </a:lnSpc>
+              <a:buNone/>
+            </a:pPr>
+            <a:r>
+              <a:rPr lang="en-US" sz="1000" dirty="0">
+                <a:solidFill>
+                  <a:srgbClr val="333333"/>
+                </a:solidFill>
+                <a:latin typeface="맑은 고딕" pitchFamily="34" charset="0"/>
+                <a:ea typeface="맑은 고딕" pitchFamily="34" charset="-122"/>
+                <a:cs typeface="맑은 고딕" pitchFamily="34" charset="-120"/>
+              </a:rPr>
+              <a:t>등록 여부와 무관하게 지급하며, 등록 거절·취하 시에도 회수하지 않습니다. 분할·계속출원은 중복 지급하지 않습니다.</a:t>
+            </a:r>
+            <a:endParaRPr lang="en-US" sz="1000" dirty="0"/>
+          </a:p>
+        </p:txBody>
+      </p:sp>
+      <p:sp>
+        <p:nvSpPr>
+          <p:cNvPr id="16" name="Shape 13"/>
+          <p:cNvSpPr/>
+          <p:nvPr/>
+        </p:nvSpPr>
+        <p:spPr>
+          <a:xfrm>
+            <a:off x="6204204" y="4608576"/>
+            <a:ext cx="2425446" cy="384048"/>
+          </a:xfrm>
+          <a:prstGeom prst="rect">
+            <a:avLst/>
+          </a:prstGeom>
+          <a:solidFill>
+            <a:srgbClr val="1C67C7"/>
+          </a:solidFill>
+          <a:ln w="12700">
+            <a:solidFill>
+              <a:srgbClr val="1C67C7"/>
+            </a:solidFill>
+            <a:prstDash val="solid"/>
+          </a:ln>
+        </p:spPr>
+      </p:sp>
+      <p:sp>
+        <p:nvSpPr>
+          <p:cNvPr id="17" name="Text 14"/>
+          <p:cNvSpPr txBox="1"/>
+          <p:nvPr/>
+        </p:nvSpPr>
+        <p:spPr>
+          <a:xfrm>
+            <a:off x="6277356" y="4608576"/>
+            <a:ext cx="2279142" cy="384048"/>
           </a:xfrm>
           <a:prstGeom prst="rect">
             <a:avLst/>
@@ -16553,75 +16061,36 @@
               <a:buNone/>
             </a:pPr>
             <a:r>
-              <a:rPr lang="en-US" sz="1000" b="1" dirty="0">
-                <a:solidFill>
-                  <a:srgbClr val="10173A"/>
-                </a:solidFill>
-                <a:latin typeface="맑은 고딕" pitchFamily="34" charset="0"/>
-                <a:ea typeface="맑은 고딕" pitchFamily="34" charset="-122"/>
-                <a:cs typeface="맑은 고딕" pitchFamily="34" charset="-120"/>
-              </a:rPr>
-              <a:t>해외출원보상금</a:t>
-            </a:r>
-            <a:endParaRPr lang="en-US" sz="1000" dirty="0"/>
-          </a:p>
-        </p:txBody>
-      </p:sp>
-      <p:sp>
-        <p:nvSpPr>
-          <p:cNvPr id="13" name="Text 10"/>
-          <p:cNvSpPr txBox="1"/>
-          <p:nvPr/>
-        </p:nvSpPr>
-        <p:spPr>
-          <a:xfrm>
-            <a:off x="2514600" y="5614416"/>
-            <a:ext cx="8759952" cy="274320"/>
-          </a:xfrm>
-          <a:prstGeom prst="rect">
-            <a:avLst/>
-          </a:prstGeom>
-          <a:noFill/>
-          <a:ln/>
-        </p:spPr>
-        <p:txBody>
-          <a:bodyPr wrap="square" lIns="0" tIns="0" rIns="0" bIns="0" rtlCol="0" anchor="ctr"/>
-          <a:lstStyle/>
-          <a:p>
-            <a:pPr indent="0" marL="0">
-              <a:buNone/>
-            </a:pPr>
-            <a:r>
-              <a:rPr lang="en-US" sz="1000" dirty="0">
-                <a:solidFill>
-                  <a:srgbClr val="333333"/>
-                </a:solidFill>
-                <a:latin typeface="맑은 고딕" pitchFamily="34" charset="0"/>
-                <a:ea typeface="맑은 고딕" pitchFamily="34" charset="-122"/>
-                <a:cs typeface="맑은 고딕" pitchFamily="34" charset="-120"/>
-              </a:rPr>
-              <a:t>발명자 1인당 연간 2개국을 한도로 하며, 원칙적으로 A등급 발명을 우선 검토합니다.</a:t>
-            </a:r>
-            <a:endParaRPr lang="en-US" sz="1000" dirty="0"/>
-          </a:p>
-        </p:txBody>
-      </p:sp>
-      <p:sp>
-        <p:nvSpPr>
-          <p:cNvPr id="14" name="Shape 11"/>
+              <a:rPr lang="en-US" sz="1100" b="1" dirty="0">
+                <a:solidFill>
+                  <a:srgbClr val="FFFFFF"/>
+                </a:solidFill>
+                <a:latin typeface="맑은 고딕" pitchFamily="34" charset="0"/>
+                <a:ea typeface="맑은 고딕" pitchFamily="34" charset="-122"/>
+                <a:cs typeface="맑은 고딕" pitchFamily="34" charset="-120"/>
+              </a:rPr>
+              <a:t>지급 시기 및 통지 (제9조)</a:t>
+            </a:r>
+            <a:endParaRPr lang="en-US" sz="1100" dirty="0"/>
+          </a:p>
+        </p:txBody>
+      </p:sp>
+      <p:sp>
+        <p:nvSpPr>
+          <p:cNvPr id="18" name="Shape 15"/>
           <p:cNvSpPr/>
           <p:nvPr/>
         </p:nvSpPr>
         <p:spPr>
           <a:xfrm>
-            <a:off x="914400" y="5961888"/>
-            <a:ext cx="1417320" cy="274320"/>
+            <a:off x="6204204" y="4992624"/>
+            <a:ext cx="2425446" cy="877824"/>
           </a:xfrm>
           <a:prstGeom prst="rect">
             <a:avLst/>
           </a:prstGeom>
           <a:solidFill>
-            <a:srgbClr val="E8F0FA"/>
+            <a:srgbClr val="FFFFFF"/>
           </a:solidFill>
           <a:ln w="12700">
             <a:solidFill>
@@ -16633,14 +16102,81 @@
       </p:sp>
       <p:sp>
         <p:nvSpPr>
-          <p:cNvPr id="15" name="Text 12"/>
-          <p:cNvSpPr txBox="1"/>
-          <p:nvPr/>
-        </p:nvSpPr>
-        <p:spPr>
-          <a:xfrm>
-            <a:off x="914400" y="5961888"/>
-            <a:ext cx="1417320" cy="274320"/>
+          <p:cNvPr id="19" name="Text 16"/>
+          <p:cNvSpPr txBox="1"/>
+          <p:nvPr/>
+        </p:nvSpPr>
+        <p:spPr>
+          <a:xfrm>
+            <a:off x="6350508" y="4992624"/>
+            <a:ext cx="2132838" cy="877824"/>
+          </a:xfrm>
+          <a:prstGeom prst="rect">
+            <a:avLst/>
+          </a:prstGeom>
+          <a:noFill/>
+          <a:ln/>
+        </p:spPr>
+        <p:txBody>
+          <a:bodyPr wrap="square" lIns="0" tIns="0" rIns="0" bIns="0" rtlCol="0" anchor="ctr"/>
+          <a:lstStyle/>
+          <a:p>
+            <a:pPr indent="0" marL="0">
+              <a:lnSpc>
+                <a:spcPts val="1500"/>
+              </a:lnSpc>
+              <a:buNone/>
+            </a:pPr>
+            <a:r>
+              <a:rPr lang="en-US" sz="1000" dirty="0">
+                <a:solidFill>
+                  <a:srgbClr val="333333"/>
+                </a:solidFill>
+                <a:latin typeface="맑은 고딕" pitchFamily="34" charset="0"/>
+                <a:ea typeface="맑은 고딕" pitchFamily="34" charset="-122"/>
+                <a:cs typeface="맑은 고딕" pitchFamily="34" charset="-120"/>
+              </a:rPr>
+              <a:t>지급 사유가 발생한 날이 속하는 달의 다음 달 급여 지급일에 지급하고, 등급과 항목별 점수를 서면 통지합니다.</a:t>
+            </a:r>
+            <a:endParaRPr lang="en-US" sz="1000" dirty="0"/>
+          </a:p>
+        </p:txBody>
+      </p:sp>
+      <p:sp>
+        <p:nvSpPr>
+          <p:cNvPr id="20" name="Shape 17"/>
+          <p:cNvSpPr/>
+          <p:nvPr/>
+        </p:nvSpPr>
+        <p:spPr>
+          <a:xfrm>
+            <a:off x="8849106" y="4608576"/>
+            <a:ext cx="2425446" cy="384048"/>
+          </a:xfrm>
+          <a:prstGeom prst="rect">
+            <a:avLst/>
+          </a:prstGeom>
+          <a:solidFill>
+            <a:srgbClr val="1C67C7"/>
+          </a:solidFill>
+          <a:ln w="12700">
+            <a:solidFill>
+              <a:srgbClr val="1C67C7"/>
+            </a:solidFill>
+            <a:prstDash val="solid"/>
+          </a:ln>
+        </p:spPr>
+      </p:sp>
+      <p:sp>
+        <p:nvSpPr>
+          <p:cNvPr id="21" name="Text 18"/>
+          <p:cNvSpPr txBox="1"/>
+          <p:nvPr/>
+        </p:nvSpPr>
+        <p:spPr>
+          <a:xfrm>
+            <a:off x="8922258" y="4608576"/>
+            <a:ext cx="2279142" cy="384048"/>
           </a:xfrm>
           <a:prstGeom prst="rect">
             <a:avLst/>
@@ -16656,15 +16192,82 @@
               <a:buNone/>
             </a:pPr>
             <a:r>
-              <a:rPr lang="en-US" sz="1000" b="1" dirty="0">
-                <a:solidFill>
-                  <a:srgbClr val="10173A"/>
-                </a:solidFill>
-                <a:latin typeface="맑은 고딕" pitchFamily="34" charset="0"/>
-                <a:ea typeface="맑은 고딕" pitchFamily="34" charset="-122"/>
-                <a:cs typeface="맑은 고딕" pitchFamily="34" charset="-120"/>
-              </a:rPr>
-              <a:t>세무 처리</a:t>
+              <a:rPr lang="en-US" sz="1100" b="1" dirty="0">
+                <a:solidFill>
+                  <a:srgbClr val="FFFFFF"/>
+                </a:solidFill>
+                <a:latin typeface="맑은 고딕" pitchFamily="34" charset="0"/>
+                <a:ea typeface="맑은 고딕" pitchFamily="34" charset="-122"/>
+                <a:cs typeface="맑은 고딕" pitchFamily="34" charset="-120"/>
+              </a:rPr>
+              <a:t>감액 · 부지급 (제8조)</a:t>
+            </a:r>
+            <a:endParaRPr lang="en-US" sz="1100" dirty="0"/>
+          </a:p>
+        </p:txBody>
+      </p:sp>
+      <p:sp>
+        <p:nvSpPr>
+          <p:cNvPr id="22" name="Shape 19"/>
+          <p:cNvSpPr/>
+          <p:nvPr/>
+        </p:nvSpPr>
+        <p:spPr>
+          <a:xfrm>
+            <a:off x="8849106" y="4992624"/>
+            <a:ext cx="2425446" cy="877824"/>
+          </a:xfrm>
+          <a:prstGeom prst="rect">
+            <a:avLst/>
+          </a:prstGeom>
+          <a:solidFill>
+            <a:srgbClr val="FFFFFF"/>
+          </a:solidFill>
+          <a:ln w="12700">
+            <a:solidFill>
+              <a:srgbClr val="C9D8EC"/>
+            </a:solidFill>
+            <a:prstDash val="solid"/>
+          </a:ln>
+        </p:spPr>
+      </p:sp>
+      <p:sp>
+        <p:nvSpPr>
+          <p:cNvPr id="23" name="Text 20"/>
+          <p:cNvSpPr txBox="1"/>
+          <p:nvPr/>
+        </p:nvSpPr>
+        <p:spPr>
+          <a:xfrm>
+            <a:off x="8995410" y="4992624"/>
+            <a:ext cx="2132838" cy="877824"/>
+          </a:xfrm>
+          <a:prstGeom prst="rect">
+            <a:avLst/>
+          </a:prstGeom>
+          <a:noFill/>
+          <a:ln/>
+        </p:spPr>
+        <p:txBody>
+          <a:bodyPr wrap="square" lIns="0" tIns="0" rIns="0" bIns="0" rtlCol="0" anchor="ctr"/>
+          <a:lstStyle/>
+          <a:p>
+            <a:pPr indent="0" marL="0">
+              <a:lnSpc>
+                <a:spcPts val="1500"/>
+              </a:lnSpc>
+              <a:buNone/>
+            </a:pPr>
+            <a:r>
+              <a:rPr lang="en-US" sz="1000" dirty="0">
+                <a:solidFill>
+                  <a:srgbClr val="333333"/>
+                </a:solidFill>
+                <a:latin typeface="맑은 고딕" pitchFamily="34" charset="0"/>
+                <a:ea typeface="맑은 고딕" pitchFamily="34" charset="-122"/>
+                <a:cs typeface="맑은 고딕" pitchFamily="34" charset="-120"/>
+              </a:rPr>
+              <a:t>허위 기재, 무단 공개로 인한 신규성 상실, 절차 협력 거부의 경우 위원회 의결로 감액하거나 지급하지 않을 수 있습니다.</a:t>
             </a:r>
             <a:endParaRPr lang="en-US" sz="1000" dirty="0"/>
           </a:p>
@@ -16672,40 +16275,40 @@
       </p:sp>
       <p:sp>
         <p:nvSpPr>
-          <p:cNvPr id="16" name="Text 13"/>
-          <p:cNvSpPr txBox="1"/>
-          <p:nvPr/>
-        </p:nvSpPr>
-        <p:spPr>
-          <a:xfrm>
-            <a:off x="2514600" y="5961888"/>
-            <a:ext cx="8759952" cy="274320"/>
-          </a:xfrm>
-          <a:prstGeom prst="rect">
-            <a:avLst/>
-          </a:prstGeom>
-          <a:noFill/>
-          <a:ln/>
-        </p:spPr>
-        <p:txBody>
-          <a:bodyPr wrap="square" lIns="0" tIns="0" rIns="0" bIns="0" rtlCol="0" anchor="ctr"/>
-          <a:lstStyle/>
-          <a:p>
-            <a:pPr indent="0" marL="0">
-              <a:buNone/>
-            </a:pPr>
-            <a:r>
-              <a:rPr lang="en-US" sz="1000" dirty="0">
-                <a:solidFill>
-                  <a:srgbClr val="333333"/>
-                </a:solidFill>
-                <a:latin typeface="맑은 고딕" pitchFamily="34" charset="0"/>
-                <a:ea typeface="맑은 고딕" pitchFamily="34" charset="-122"/>
-                <a:cs typeface="맑은 고딕" pitchFamily="34" charset="-120"/>
-              </a:rPr>
-              <a:t>「소득세법」 제12조제3호 어목에 따라 연간 700만원까지 비과세되며, 지급 전 해당 연도 누적 지급액을 확인합니다.</a:t>
-            </a:r>
-            <a:endParaRPr lang="en-US" sz="1000" dirty="0"/>
+          <p:cNvPr id="24" name="Text 21"/>
+          <p:cNvSpPr txBox="1"/>
+          <p:nvPr/>
+        </p:nvSpPr>
+        <p:spPr>
+          <a:xfrm>
+            <a:off x="914400" y="5980176"/>
+            <a:ext cx="10360152" cy="256032"/>
+          </a:xfrm>
+          <a:prstGeom prst="rect">
+            <a:avLst/>
+          </a:prstGeom>
+          <a:noFill/>
+          <a:ln/>
+        </p:spPr>
+        <p:txBody>
+          <a:bodyPr wrap="square" lIns="0" tIns="0" rIns="0" bIns="0" rtlCol="0" anchor="ctr"/>
+          <a:lstStyle/>
+          <a:p>
+            <a:pPr indent="0" marL="0">
+              <a:buNone/>
+            </a:pPr>
+            <a:r>
+              <a:rPr lang="en-US" sz="950" dirty="0">
+                <a:solidFill>
+                  <a:srgbClr val="7B8492"/>
+                </a:solidFill>
+                <a:latin typeface="맑은 고딕" pitchFamily="34" charset="0"/>
+                <a:ea typeface="맑은 고딕" pitchFamily="34" charset="-122"/>
+                <a:cs typeface="맑은 고딕" pitchFamily="34" charset="-120"/>
+              </a:rPr>
+              <a:t>※ 보상금은 「소득세법」 제12조제3호 어목에 따라 연간 700만원까지 비과세되며, 재직 중 지급분은 근로소득, 퇴직 후 지급분은 기타소득으로 처리합니다.</a:t>
+            </a:r>
+            <a:endParaRPr lang="en-US" sz="950" dirty="0"/>
           </a:p>
         </p:txBody>
       </p:sp>

--- a/docs/patent-committee/특허심의위원회_설치운영안_보고.pptx
+++ b/docs/patent-committee/특허심의위원회_설치운영안_보고.pptx
@@ -2074,7 +2074,7 @@
                 <a:ea typeface="맑은 고딕" pitchFamily="34" charset="-122"/>
                 <a:cs typeface="맑은 고딕" pitchFamily="34" charset="-120"/>
               </a:rPr>
-              <a:t>2026. 9. 4.</a:t>
+              <a:t>2026. 9.</a:t>
             </a:r>
             <a:endParaRPr lang="en-US" sz="1200" dirty="0"/>
           </a:p>
@@ -2094,7 +2094,7 @@
                 <a:ea typeface="맑은 고딕" pitchFamily="34" charset="-122"/>
                 <a:cs typeface="맑은 고딕" pitchFamily="34" charset="-120"/>
               </a:rPr>
-              <a:t>연구기획팀</a:t>
+              <a:t>연구기획팀 배준호 연구원</a:t>
             </a:r>
             <a:endParaRPr lang="en-US" sz="1200" dirty="0"/>
           </a:p>
@@ -6621,7 +6621,7 @@
                 <a:ea typeface="맑은 고딕" pitchFamily="34" charset="-122"/>
                 <a:cs typeface="맑은 고딕" pitchFamily="34" charset="-120"/>
               </a:rPr>
-              <a:t>㈜엔키화이트햇  연구기획팀  ·  2026. 9. 4.</a:t>
+              <a:t>㈜엔키화이트햇  연구기획팀 배준호 연구원  ·  2026. 9.</a:t>
             </a:r>
             <a:endParaRPr lang="en-US" sz="1050" dirty="0"/>
           </a:p>

--- a/docs/patent-committee/특허심의위원회_설치운영안_보고.pptx
+++ b/docs/patent-committee/특허심의위원회_설치운영안_보고.pptx
@@ -8346,7 +8346,7 @@
                 <a:ea typeface="맑은 고딕" pitchFamily="34" charset="-122"/>
                 <a:cs typeface="맑은 고딕" pitchFamily="34" charset="-120"/>
               </a:rPr>
-              <a:t>제품개발팀 아이디어 심의</a:t>
+              <a:t>전사 발명 아이디어 심의</a:t>
             </a:r>
             <a:endParaRPr lang="en-US" sz="1050" dirty="0"/>
           </a:p>
@@ -12183,7 +12183,7 @@
                 <a:ea typeface="맑은 고딕" pitchFamily="34" charset="-122"/>
                 <a:cs typeface="맑은 고딕" pitchFamily="34" charset="-120"/>
               </a:rPr>
-              <a:t>직무발명의 승계·출원 여부 의결   ·   보상 등급(A·B·C) 결정   ·   기 보유 지식재산권의 연차료 및 유지·포기 판단   ·   해외 출원 대상 선정</a:t>
+              <a:t>전 임직원의 직무발명에 대한 승계·출원 여부 의결   ·   보상 등급(A·B·C) 결정   ·   기 보유 지식재산권의 연차료 및 유지·포기 판단   ·   해외 출원 대상 선정</a:t>
             </a:r>
             <a:endParaRPr lang="en-US" sz="1000" dirty="0"/>
           </a:p>

--- a/docs/patent-committee/특허심의위원회_설치운영안_보고.pptx
+++ b/docs/patent-committee/특허심의위원회_설치운영안_보고.pptx
@@ -1968,24 +1968,24 @@
         </p:nvSpPr>
         <p:spPr>
           <a:xfrm>
-            <a:off x="914400" y="1847088"/>
-            <a:ext cx="7863840" cy="658368"/>
-          </a:xfrm>
-          <a:prstGeom prst="rect">
-            <a:avLst/>
-          </a:prstGeom>
-          <a:noFill/>
-          <a:ln/>
-        </p:spPr>
-        <p:txBody>
-          <a:bodyPr wrap="square" lIns="0" tIns="0" rIns="0" bIns="0" rtlCol="0" anchor="ctr"/>
-          <a:lstStyle/>
-          <a:p>
-            <a:pPr indent="0" marL="0">
-              <a:buNone/>
-            </a:pPr>
-            <a:r>
-              <a:rPr lang="en-US" sz="3400" b="1" dirty="0">
+            <a:off x="914400" y="1188720"/>
+            <a:ext cx="9875520" cy="896112"/>
+          </a:xfrm>
+          <a:prstGeom prst="rect">
+            <a:avLst/>
+          </a:prstGeom>
+          <a:noFill/>
+          <a:ln/>
+        </p:spPr>
+        <p:txBody>
+          <a:bodyPr wrap="square" lIns="0" tIns="0" rIns="0" bIns="0" rtlCol="0" anchor="ctr"/>
+          <a:lstStyle/>
+          <a:p>
+            <a:pPr indent="0" marL="0">
+              <a:buNone/>
+            </a:pPr>
+            <a:r>
+              <a:rPr lang="en-US" sz="5000" b="1" dirty="0">
                 <a:solidFill>
                   <a:srgbClr val="FFFFFF"/>
                 </a:solidFill>
@@ -1995,7 +1995,7 @@
               </a:rPr>
               <a:t>특허심의위원회 설치·운영(안)</a:t>
             </a:r>
-            <a:endParaRPr lang="en-US" sz="3400" dirty="0"/>
+            <a:endParaRPr lang="en-US" sz="5000" dirty="0"/>
           </a:p>
         </p:txBody>
       </p:sp>
@@ -2007,24 +2007,24 @@
         </p:nvSpPr>
         <p:spPr>
           <a:xfrm>
-            <a:off x="932688" y="2615184"/>
-            <a:ext cx="7863840" cy="329184"/>
-          </a:xfrm>
-          <a:prstGeom prst="rect">
-            <a:avLst/>
-          </a:prstGeom>
-          <a:noFill/>
-          <a:ln/>
-        </p:spPr>
-        <p:txBody>
-          <a:bodyPr wrap="square" lIns="0" tIns="0" rIns="0" bIns="0" rtlCol="0" anchor="ctr"/>
-          <a:lstStyle/>
-          <a:p>
-            <a:pPr indent="0" marL="0">
-              <a:buNone/>
-            </a:pPr>
-            <a:r>
-              <a:rPr lang="en-US" sz="1500" dirty="0">
+            <a:off x="932688" y="2212848"/>
+            <a:ext cx="7863840" cy="347472"/>
+          </a:xfrm>
+          <a:prstGeom prst="rect">
+            <a:avLst/>
+          </a:prstGeom>
+          <a:noFill/>
+          <a:ln/>
+        </p:spPr>
+        <p:txBody>
+          <a:bodyPr wrap="square" lIns="0" tIns="0" rIns="0" bIns="0" rtlCol="0" anchor="ctr"/>
+          <a:lstStyle/>
+          <a:p>
+            <a:pPr indent="0" marL="0">
+              <a:buNone/>
+            </a:pPr>
+            <a:r>
+              <a:rPr lang="en-US" sz="1600" dirty="0">
                 <a:solidFill>
                   <a:srgbClr val="AEBBD8"/>
                 </a:solidFill>
@@ -2034,7 +2034,7 @@
               </a:rPr>
               <a:t>「발명진흥법」에 따른 직무발명 관리체계 정비</a:t>
             </a:r>
-            <a:endParaRPr lang="en-US" sz="1500" dirty="0"/>
+            <a:endParaRPr lang="en-US" sz="1600" dirty="0"/>
           </a:p>
         </p:txBody>
       </p:sp>
@@ -2046,8 +2046,8 @@
         </p:nvSpPr>
         <p:spPr>
           <a:xfrm>
-            <a:off x="932688" y="5413248"/>
-            <a:ext cx="4572000" cy="566928"/>
+            <a:off x="932688" y="5650992"/>
+            <a:ext cx="4572000" cy="585216"/>
           </a:xfrm>
           <a:prstGeom prst="rect">
             <a:avLst/>
@@ -2061,12 +2061,12 @@
           <a:p>
             <a:pPr indent="0" marL="0">
               <a:lnSpc>
-                <a:spcPts val="2000"/>
+                <a:spcPts val="2100"/>
               </a:lnSpc>
               <a:buNone/>
             </a:pPr>
             <a:r>
-              <a:rPr lang="en-US" sz="1200" dirty="0">
+              <a:rPr lang="en-US" sz="1250" dirty="0">
                 <a:solidFill>
                   <a:srgbClr val="D6DDEC"/>
                 </a:solidFill>
@@ -2076,17 +2076,17 @@
               </a:rPr>
               <a:t>2026. 9.</a:t>
             </a:r>
-            <a:endParaRPr lang="en-US" sz="1200" dirty="0"/>
+            <a:endParaRPr lang="en-US" sz="1250" dirty="0"/>
           </a:p>
           <a:p>
             <a:pPr indent="0" marL="0">
               <a:lnSpc>
-                <a:spcPts val="2000"/>
+                <a:spcPts val="2100"/>
               </a:lnSpc>
               <a:buNone/>
             </a:pPr>
             <a:r>
-              <a:rPr lang="en-US" sz="1200" dirty="0">
+              <a:rPr lang="en-US" sz="1250" dirty="0">
                 <a:solidFill>
                   <a:srgbClr val="D6DDEC"/>
                 </a:solidFill>
@@ -2096,7 +2096,7 @@
               </a:rPr>
               <a:t>연구기획팀 배준호 연구원</a:t>
             </a:r>
-            <a:endParaRPr lang="en-US" sz="1200" dirty="0"/>
+            <a:endParaRPr lang="en-US" sz="1250" dirty="0"/>
           </a:p>
         </p:txBody>
       </p:sp>
